--- a/reports/PR2025-26_VMESNA_08.pptx
+++ b/reports/PR2025-26_VMESNA_08.pptx
@@ -5525,15 +5525,23 @@
           <a:p>
             <a:r>
               <a:rPr lang="sl-SI" sz="1600" dirty="0"/>
-              <a:t>Izrazito največ oglasov v osrednjeslovenski regiji (1915), sledita ji </a:t>
-            </a:r>
-            <a:r>
-              <a:rPr lang="sl-SI" sz="1600" dirty="0" err="1"/>
-              <a:t>Gorenska</a:t>
+              <a:t>Izrazito največ oglasov v osrednjeslovenski regiji (1915), sledita </a:t>
+            </a:r>
+            <a:r>
+              <a:rPr lang="sl-SI" sz="1600"/>
+              <a:t>ji gorenjska </a:t>
             </a:r>
             <a:r>
               <a:rPr lang="sl-SI" sz="1600" dirty="0"/>
-              <a:t> (481) in Podravska (455)</a:t>
+              <a:t>(481) </a:t>
+            </a:r>
+            <a:r>
+              <a:rPr lang="sl-SI" sz="1600"/>
+              <a:t>in podravska </a:t>
+            </a:r>
+            <a:r>
+              <a:rPr lang="sl-SI" sz="1600" dirty="0"/>
+              <a:t>(455)</a:t>
             </a:r>
           </a:p>
           <a:p>

--- a/reports/PR2025-26_VMESNA_08.pptx
+++ b/reports/PR2025-26_VMESNA_08.pptx
@@ -5511,37 +5511,25 @@
           <a:p>
             <a:r>
               <a:rPr lang="sl-SI" sz="1600" dirty="0"/>
-              <a:t>Največ oglasov objavil Mercator (188), sledita mu Lidl(101) in Alpe-</a:t>
+              <a:t>Največ oglasov objavil Mercator (188), sledita mu Lidl (101) in Alpe-</a:t>
             </a:r>
             <a:r>
               <a:rPr lang="sl-SI" sz="1600" dirty="0" err="1"/>
               <a:t>Panon</a:t>
             </a:r>
             <a:r>
+              <a:rPr lang="sl-SI" sz="1600"/>
+              <a:t> (</a:t>
+            </a:r>
+            <a:r>
               <a:rPr lang="sl-SI" sz="1600" dirty="0"/>
-              <a:t>(71)</a:t>
+              <a:t>71)</a:t>
             </a:r>
           </a:p>
           <a:p>
             <a:r>
               <a:rPr lang="sl-SI" sz="1600" dirty="0"/>
-              <a:t>Izrazito največ oglasov v osrednjeslovenski regiji (1915), sledita </a:t>
-            </a:r>
-            <a:r>
-              <a:rPr lang="sl-SI" sz="1600"/>
-              <a:t>ji gorenjska </a:t>
-            </a:r>
-            <a:r>
-              <a:rPr lang="sl-SI" sz="1600" dirty="0"/>
-              <a:t>(481) </a:t>
-            </a:r>
-            <a:r>
-              <a:rPr lang="sl-SI" sz="1600"/>
-              <a:t>in podravska </a:t>
-            </a:r>
-            <a:r>
-              <a:rPr lang="sl-SI" sz="1600" dirty="0"/>
-              <a:t>(455)</a:t>
+              <a:t>Izrazito največ oglasov v osrednjeslovenski regiji (1915), sledita ji gorenjska (481) in podravska (455)</a:t>
             </a:r>
           </a:p>
           <a:p>
@@ -5683,7 +5671,7 @@
         <p:spPr>
           <a:xfrm>
             <a:off x="242375" y="2155707"/>
-            <a:ext cx="4695385" cy="2328448"/>
+            <a:ext cx="4812562" cy="2386556"/>
           </a:xfrm>
           <a:prstGeom prst="rect">
             <a:avLst/>
@@ -5712,7 +5700,7 @@
         </p:blipFill>
         <p:spPr>
           <a:xfrm>
-            <a:off x="5080743" y="2338945"/>
+            <a:off x="5080743" y="2361247"/>
             <a:ext cx="3933342" cy="1852055"/>
           </a:xfrm>
           <a:prstGeom prst="rect">

--- a/reports/PR2025-26_VMESNA_08.pptx
+++ b/reports/PR2025-26_VMESNA_08.pptx
@@ -5,15 +5,14 @@
     <p:sldMasterId id="2147483660" r:id="rId1"/>
   </p:sldMasterIdLst>
   <p:notesMasterIdLst>
-    <p:notesMasterId r:id="rId5"/>
+    <p:notesMasterId r:id="rId4"/>
   </p:notesMasterIdLst>
   <p:handoutMasterIdLst>
-    <p:handoutMasterId r:id="rId6"/>
+    <p:handoutMasterId r:id="rId5"/>
   </p:handoutMasterIdLst>
   <p:sldIdLst>
     <p:sldId id="256" r:id="rId2"/>
     <p:sldId id="258" r:id="rId3"/>
-    <p:sldId id="259" r:id="rId4"/>
   </p:sldIdLst>
   <p:sldSz cx="9144000" cy="5143500" type="screen16x9"/>
   <p:notesSz cx="6858000" cy="9144000"/>
@@ -817,90 +816,6 @@
     <p:extLst>
       <p:ext uri="{BB962C8B-B14F-4D97-AF65-F5344CB8AC3E}">
         <p14:creationId xmlns:p14="http://schemas.microsoft.com/office/powerpoint/2010/main" val="2912584355"/>
-      </p:ext>
-    </p:extLst>
-  </p:cSld>
-  <p:clrMapOvr>
-    <a:masterClrMapping/>
-  </p:clrMapOvr>
-</p:notes>
-</file>
-
-<file path=ppt/notesSlides/notesSlide3.xml><?xml version="1.0" encoding="utf-8"?>
-<p:notes xmlns:a="http://schemas.openxmlformats.org/drawingml/2006/main" xmlns:r="http://schemas.openxmlformats.org/officeDocument/2006/relationships" xmlns:p="http://schemas.openxmlformats.org/presentationml/2006/main">
-  <p:cSld>
-    <p:spTree>
-      <p:nvGrpSpPr>
-        <p:cNvPr id="1" name=""/>
-        <p:cNvGrpSpPr/>
-        <p:nvPr/>
-      </p:nvGrpSpPr>
-      <p:grpSpPr>
-        <a:xfrm>
-          <a:off x="0" y="0"/>
-          <a:ext cx="0" cy="0"/>
-          <a:chOff x="0" y="0"/>
-          <a:chExt cx="0" cy="0"/>
-        </a:xfrm>
-      </p:grpSpPr>
-      <p:sp>
-        <p:nvSpPr>
-          <p:cNvPr id="2" name="Označba mesta stranske slike 1"/>
-          <p:cNvSpPr>
-            <a:spLocks noGrp="1" noRot="1" noChangeAspect="1"/>
-          </p:cNvSpPr>
-          <p:nvPr>
-            <p:ph type="sldImg"/>
-          </p:nvPr>
-        </p:nvSpPr>
-        <p:spPr/>
-      </p:sp>
-      <p:sp>
-        <p:nvSpPr>
-          <p:cNvPr id="3" name="Označba mesta opomb 2"/>
-          <p:cNvSpPr>
-            <a:spLocks noGrp="1"/>
-          </p:cNvSpPr>
-          <p:nvPr>
-            <p:ph type="body" idx="1"/>
-          </p:nvPr>
-        </p:nvSpPr>
-        <p:spPr/>
-        <p:txBody>
-          <a:bodyPr/>
-          <a:lstStyle/>
-          <a:p>
-            <a:endParaRPr lang="sl-SI" dirty="0"/>
-          </a:p>
-        </p:txBody>
-      </p:sp>
-      <p:sp>
-        <p:nvSpPr>
-          <p:cNvPr id="4" name="Označba mesta številke diapozitiva 3"/>
-          <p:cNvSpPr>
-            <a:spLocks noGrp="1"/>
-          </p:cNvSpPr>
-          <p:nvPr>
-            <p:ph type="sldNum" sz="quarter" idx="5"/>
-          </p:nvPr>
-        </p:nvSpPr>
-        <p:spPr/>
-        <p:txBody>
-          <a:bodyPr/>
-          <a:lstStyle/>
-          <a:p>
-            <a:fld id="{B3847C52-DF7F-F947-B704-F0BAD17B1E31}" type="slidenum">
-              <a:rPr lang="en-US" smtClean="0"/>
-              <a:t>3</a:t>
-            </a:fld>
-            <a:endParaRPr lang="en-US"/>
-          </a:p>
-        </p:txBody>
-      </p:sp>
-    </p:spTree>
-    <p:extLst>
-      <p:ext uri="{BB962C8B-B14F-4D97-AF65-F5344CB8AC3E}">
-        <p14:creationId xmlns:p14="http://schemas.microsoft.com/office/powerpoint/2010/main" val="2570441510"/>
       </p:ext>
     </p:extLst>
   </p:cSld>
@@ -3906,18 +3821,7 @@
               </a:rPr>
               <a:t> </a:t>
             </a:r>
-            <a:r>
-              <a:rPr lang="sl-SI" sz="1600" dirty="0"/>
-              <a:t>. Hranjenje v tabelah data in </a:t>
-            </a:r>
-            <a:r>
-              <a:rPr lang="sl-SI" sz="1600" dirty="0" err="1"/>
-              <a:t>changes</a:t>
-            </a:r>
-            <a:r>
-              <a:rPr lang="sl-SI" sz="1600" dirty="0"/>
-              <a:t>.</a:t>
-            </a:r>
+            <a:endParaRPr lang="sl-SI" sz="1600" dirty="0"/>
           </a:p>
           <a:p>
             <a:pPr>
@@ -3926,9 +3830,28 @@
             </a:pPr>
             <a:r>
               <a:rPr lang="sl-SI" sz="1600" dirty="0"/>
-              <a:t>Namen zbiranja: Analiza trga študentskega dela v Sloveniji, podpora študentom</a:t>
-            </a:r>
-            <a:endParaRPr lang="en-US" sz="1600" dirty="0"/>
+              <a:t>Hranjenje:  tabeli </a:t>
+            </a:r>
+            <a:r>
+              <a:rPr lang="sl-SI" sz="1600" dirty="0">
+                <a:solidFill>
+                  <a:schemeClr val="tx2"/>
+                </a:solidFill>
+              </a:rPr>
+              <a:t>data.csv </a:t>
+            </a:r>
+            <a:r>
+              <a:rPr lang="sl-SI" sz="1600" dirty="0"/>
+              <a:t>in </a:t>
+            </a:r>
+            <a:r>
+              <a:rPr lang="sl-SI" sz="1600" dirty="0">
+                <a:solidFill>
+                  <a:schemeClr val="tx2"/>
+                </a:solidFill>
+              </a:rPr>
+              <a:t>changes.csv</a:t>
+            </a:r>
           </a:p>
           <a:p>
             <a:pPr>
@@ -3937,16 +3860,13 @@
             </a:pPr>
             <a:r>
               <a:rPr lang="sl-SI" sz="1600" dirty="0"/>
-              <a:t>Tip podatkov: Tekstovni </a:t>
-            </a:r>
-            <a:r>
-              <a:rPr lang="en-US" sz="1600" dirty="0"/>
-              <a:t>in </a:t>
-            </a:r>
-            <a:r>
-              <a:rPr lang="sl-SI" sz="1600" dirty="0"/>
-              <a:t>numerični podatki, strukturirani in nestrukturirani</a:t>
-            </a:r>
+              <a:t>Tip podatkov: strukturirani in nestrukturirani</a:t>
+            </a:r>
+            <a:endParaRPr lang="sl-SI" sz="1600" dirty="0">
+              <a:solidFill>
+                <a:schemeClr val="tx2"/>
+              </a:solidFill>
+            </a:endParaRPr>
           </a:p>
           <a:p>
             <a:pPr>
@@ -3955,7 +3875,7 @@
             </a:pPr>
             <a:r>
               <a:rPr lang="sl-SI" sz="1600" dirty="0"/>
-              <a:t>Obseg podatkov: Do danes zbranih več kot 4400 oglasov, del podatkov o oglasu je obvezen</a:t>
+              <a:t>Namen zbiranja: Analiza trga študentskega dela v Sloveniji, podpora študentom</a:t>
             </a:r>
             <a:endParaRPr lang="en-US" sz="1600" dirty="0"/>
           </a:p>
@@ -3966,70 +3886,8 @@
             </a:pPr>
             <a:r>
               <a:rPr lang="sl-SI" sz="1600" dirty="0"/>
-              <a:t>Opis </a:t>
-            </a:r>
-            <a:r>
-              <a:rPr lang="sl-SI" sz="1600" dirty="0" err="1"/>
-              <a:t>predprocesiranja</a:t>
-            </a:r>
-            <a:r>
-              <a:rPr lang="sl-SI" sz="1600" dirty="0"/>
-              <a:t>: Normalizacija lokacije in tipa plačila oglasov</a:t>
-            </a:r>
-          </a:p>
-          <a:p>
-            <a:pPr marL="0" indent="0">
-              <a:buNone/>
-            </a:pPr>
-            <a:endParaRPr lang="en-US" sz="1600" dirty="0"/>
-          </a:p>
-          <a:p>
-            <a:pPr marL="0" indent="0">
-              <a:buNone/>
-            </a:pPr>
-            <a:endParaRPr lang="en-US" sz="1600" dirty="0"/>
-          </a:p>
-          <a:p>
-            <a:pPr marL="0" indent="0">
-              <a:buNone/>
-            </a:pPr>
-            <a:r>
-              <a:rPr lang="en-US" sz="1600" b="1" dirty="0" err="1"/>
-              <a:t>Glavna</a:t>
-            </a:r>
-            <a:r>
-              <a:rPr lang="en-US" sz="1600" b="1" dirty="0"/>
-              <a:t> </a:t>
-            </a:r>
-            <a:r>
-              <a:rPr lang="en-US" sz="1600" b="1" dirty="0" err="1"/>
-              <a:t>vprašanja</a:t>
-            </a:r>
-            <a:r>
-              <a:rPr lang="en-US" sz="1600" b="1" dirty="0"/>
-              <a:t>/</a:t>
-            </a:r>
-            <a:r>
-              <a:rPr lang="en-US" sz="1600" b="1" dirty="0" err="1"/>
-              <a:t>cilji</a:t>
-            </a:r>
-            <a:r>
-              <a:rPr lang="en-US" sz="1600" b="1" dirty="0"/>
-              <a:t> </a:t>
-            </a:r>
-            <a:r>
-              <a:rPr lang="en-US" sz="1600" b="1" dirty="0" err="1"/>
-              <a:t>podatkovnega</a:t>
-            </a:r>
-            <a:r>
-              <a:rPr lang="en-US" sz="1600" b="1" dirty="0"/>
-              <a:t> </a:t>
-            </a:r>
-            <a:r>
-              <a:rPr lang="en-US" sz="1600" b="1" dirty="0" err="1"/>
-              <a:t>rudarjenja</a:t>
-            </a:r>
-            <a:endParaRPr lang="en-US" sz="1600" b="1" dirty="0"/>
+              <a:t>Obseg podatkov: več kot 4400 oglasov</a:t>
+            </a:r>
           </a:p>
           <a:p>
             <a:pPr>
@@ -4037,10 +3895,84 @@
               <a:buChar char="-"/>
             </a:pPr>
             <a:r>
+              <a:rPr lang="sl-SI" sz="1600" dirty="0" err="1"/>
+              <a:t>Predprocesiranje</a:t>
+            </a:r>
+            <a:r>
               <a:rPr lang="sl-SI" sz="1600" dirty="0"/>
-              <a:t>Ali delodajalci dvigujejo plače, ko oglasa ne morejo zapolniti?</a:t>
-            </a:r>
+              <a:t>: Normalizacija lokacije → 12 </a:t>
+            </a:r>
+            <a:r>
+              <a:rPr lang="sl-SI" sz="1600" dirty="0" err="1"/>
+              <a:t>statistčnih</a:t>
+            </a:r>
+            <a:r>
+              <a:rPr lang="sl-SI" sz="1600" dirty="0"/>
+              <a:t> regij in </a:t>
+            </a:r>
+          </a:p>
+          <a:p>
+            <a:pPr marL="0" indent="0">
+              <a:buNone/>
+            </a:pPr>
+            <a:r>
+              <a:rPr lang="sl-SI" sz="1600" dirty="0"/>
+              <a:t>    tipa plačila oglasov → standardizirane kategorije</a:t>
+            </a:r>
+          </a:p>
+          <a:p>
+            <a:pPr marL="0" indent="0">
+              <a:buNone/>
+            </a:pPr>
             <a:endParaRPr lang="en-US" sz="1600" dirty="0"/>
+          </a:p>
+          <a:p>
+            <a:pPr marL="0" indent="0">
+              <a:buNone/>
+            </a:pPr>
+            <a:endParaRPr lang="sl-SI" sz="1600" b="1" dirty="0"/>
+          </a:p>
+          <a:p>
+            <a:pPr marL="0" indent="0">
+              <a:buNone/>
+            </a:pPr>
+            <a:r>
+              <a:rPr lang="en-US" sz="1600" b="1" dirty="0" err="1"/>
+              <a:t>Glavna</a:t>
+            </a:r>
+            <a:r>
+              <a:rPr lang="en-US" sz="1600" b="1" dirty="0"/>
+              <a:t> </a:t>
+            </a:r>
+            <a:r>
+              <a:rPr lang="en-US" sz="1600" b="1" dirty="0" err="1"/>
+              <a:t>vprašanja</a:t>
+            </a:r>
+            <a:r>
+              <a:rPr lang="en-US" sz="1600" b="1" dirty="0"/>
+              <a:t>/</a:t>
+            </a:r>
+            <a:r>
+              <a:rPr lang="en-US" sz="1600" b="1" dirty="0" err="1"/>
+              <a:t>cilji</a:t>
+            </a:r>
+            <a:r>
+              <a:rPr lang="en-US" sz="1600" b="1" dirty="0"/>
+              <a:t> </a:t>
+            </a:r>
+            <a:r>
+              <a:rPr lang="en-US" sz="1600" b="1" dirty="0" err="1"/>
+              <a:t>podatkovnega</a:t>
+            </a:r>
+            <a:r>
+              <a:rPr lang="en-US" sz="1600" b="1" dirty="0"/>
+              <a:t> </a:t>
+            </a:r>
+            <a:r>
+              <a:rPr lang="en-US" sz="1600" b="1" dirty="0" err="1"/>
+              <a:t>rudarjenja</a:t>
+            </a:r>
+            <a:endParaRPr lang="en-US" sz="1600" b="1" dirty="0"/>
           </a:p>
           <a:p>
             <a:pPr>
@@ -4049,7 +3981,7 @@
             </a:pPr>
             <a:r>
               <a:rPr lang="sl-SI" sz="1600" dirty="0"/>
-              <a:t>Katere lastnosti imajo bolje plačani oglasi?</a:t>
+              <a:t>Kje in za kakšno delo se študentom splača delati?</a:t>
             </a:r>
             <a:endParaRPr lang="en-US" sz="1600" dirty="0"/>
           </a:p>
@@ -4060,7 +3992,17 @@
             </a:pPr>
             <a:r>
               <a:rPr lang="sl-SI" sz="1600" dirty="0"/>
-              <a:t>Kje so dela najbolj plačana?</a:t>
+              <a:t>Kako se trg giblje skozi čas - kdaj in zakaj se plače dvigajo?</a:t>
+            </a:r>
+          </a:p>
+          <a:p>
+            <a:pPr>
+              <a:buFontTx/>
+              <a:buChar char="-"/>
+            </a:pPr>
+            <a:r>
+              <a:rPr lang="sl-SI" sz="1600" dirty="0"/>
+              <a:t>Katera podjetja in regije dominirajo ponudbo?</a:t>
             </a:r>
             <a:endParaRPr lang="en-US" sz="1600" dirty="0"/>
           </a:p>
@@ -4274,7 +4216,7 @@
         </p:blipFill>
         <p:spPr>
           <a:xfrm>
-            <a:off x="2706889" y="2857228"/>
+            <a:off x="2706889" y="2836771"/>
             <a:ext cx="5476991" cy="609872"/>
           </a:xfrm>
           <a:prstGeom prst="rect">
@@ -4330,8 +4272,8 @@
         </p:nvSpPr>
         <p:spPr>
           <a:xfrm>
-            <a:off x="100719" y="397764"/>
-            <a:ext cx="4403432" cy="4336162"/>
+            <a:off x="118965" y="343576"/>
+            <a:ext cx="4403432" cy="4471892"/>
           </a:xfrm>
           <a:ln>
             <a:solidFill>
@@ -4345,72 +4287,38 @@
           </a:bodyPr>
           <a:lstStyle/>
           <a:p>
-            <a:pPr marL="0" indent="0">
-              <a:buNone/>
-            </a:pPr>
-            <a:r>
-              <a:rPr lang="sl-SI" sz="1600" b="1" dirty="0"/>
-              <a:t>Ali delodajalci dvigujejo plače, ko oglasa ne morejo zapolniti? </a:t>
-            </a:r>
-          </a:p>
-          <a:p>
-            <a:r>
-              <a:rPr lang="sl-SI" sz="1600" dirty="0"/>
-              <a:t>Analiza sprememb urne postavke</a:t>
-            </a:r>
-          </a:p>
-          <a:p>
-            <a:r>
-              <a:rPr lang="sl-SI" sz="1600" dirty="0"/>
-              <a:t>Spremljamo spremembe postavke glede na količino spremembe in čas od objave oglasa</a:t>
-            </a:r>
-          </a:p>
-          <a:p>
-            <a:endParaRPr lang="sl-SI" sz="1600" dirty="0"/>
-          </a:p>
-          <a:p>
-            <a:pPr marL="0" indent="0">
-              <a:buNone/>
-            </a:pPr>
-            <a:endParaRPr lang="sl-SI" sz="1600" dirty="0"/>
-          </a:p>
-          <a:p>
-            <a:pPr marL="0" indent="0">
-              <a:buNone/>
-            </a:pPr>
-            <a:r>
-              <a:rPr lang="sl-SI" sz="1600" b="1" dirty="0"/>
-              <a:t>Katere lastnosti imajo bolje plačani oglasi? Kje so dela najbolj plačana?</a:t>
-            </a:r>
-          </a:p>
-          <a:p>
-            <a:r>
-              <a:rPr lang="sl-SI" sz="1600" dirty="0"/>
-              <a:t>Uporabimo oglase s tipom plačila HOURLY</a:t>
-            </a:r>
-            <a:endParaRPr lang="sl-SI" sz="1600" b="1" dirty="0"/>
-          </a:p>
-          <a:p>
-            <a:r>
-              <a:rPr lang="sl-SI" sz="1600" dirty="0"/>
-              <a:t>Primerjava postavke glede na ostale atribute oglasa</a:t>
-            </a:r>
-          </a:p>
-          <a:p>
-            <a:pPr marL="0" indent="0">
-              <a:buNone/>
-            </a:pPr>
-            <a:endParaRPr lang="sl-SI" sz="1600" dirty="0"/>
-          </a:p>
-          <a:p>
-            <a:pPr marL="0" indent="0">
-              <a:buNone/>
-            </a:pPr>
-            <a:r>
-              <a:rPr lang="sl-SI" sz="1600" dirty="0"/>
-              <a:t>  </a:t>
-            </a:r>
-            <a:endParaRPr lang="en-US" sz="1600" dirty="0"/>
+            <a:r>
+              <a:rPr lang="sl-SI" sz="1500" dirty="0"/>
+              <a:t>Primerjalna analiza urnih postavk po regijah in kategorijah dela</a:t>
+            </a:r>
+          </a:p>
+          <a:p>
+            <a:r>
+              <a:rPr lang="sl-SI" sz="1500" dirty="0"/>
+              <a:t>Sledenje spremembam oglasov (dvigi plač, trajanje aktivnosti)</a:t>
+            </a:r>
+          </a:p>
+          <a:p>
+            <a:r>
+              <a:rPr lang="sl-SI" sz="1500" dirty="0"/>
+              <a:t>Analiza strukture trga: koncentracija podjetij, geografska porazdelitev</a:t>
+            </a:r>
+          </a:p>
+          <a:p>
+            <a:r>
+              <a:rPr lang="sl-SI" sz="1500" dirty="0" err="1"/>
+              <a:t>Regex</a:t>
+            </a:r>
+            <a:r>
+              <a:rPr lang="sl-SI" sz="1500" dirty="0"/>
+              <a:t> analiza opisov del </a:t>
+            </a:r>
+          </a:p>
+          <a:p>
+            <a:r>
+              <a:rPr lang="sl-SI" sz="1500" dirty="0"/>
+              <a:t>Testiranje hipoteze: višja plača → hitrejše zapolnjevanje</a:t>
+            </a:r>
           </a:p>
         </p:txBody>
       </p:sp>
@@ -4432,8 +4340,8 @@
         </p:nvSpPr>
         <p:spPr>
           <a:xfrm>
-            <a:off x="4588962" y="397764"/>
-            <a:ext cx="4462272" cy="4336162"/>
+            <a:off x="4588962" y="338292"/>
+            <a:ext cx="4462272" cy="4477176"/>
           </a:xfrm>
           <a:ln>
             <a:solidFill>
@@ -4448,8 +4356,40 @@
           <a:lstStyle/>
           <a:p>
             <a:r>
-              <a:rPr lang="sl-SI" sz="1600" dirty="0"/>
-              <a:t>Mediana dni do dviga: 15</a:t>
+              <a:rPr lang="sl-SI" sz="1500" dirty="0"/>
+              <a:t>Majhen vpliv regije na plačo (razpon median 0,42€), velik vpliv vrste dela (razpon 3,45€)</a:t>
+            </a:r>
+          </a:p>
+          <a:p>
+            <a:r>
+              <a:rPr lang="sl-SI" sz="1500" dirty="0"/>
+              <a:t>Vse spremembe postavke → dvigi (približno 1€ po okoli 14 dneh od objave)</a:t>
+            </a:r>
+          </a:p>
+          <a:p>
+            <a:r>
+              <a:rPr lang="sl-SI" sz="1500" dirty="0"/>
+              <a:t>Močno </a:t>
+            </a:r>
+            <a:r>
+              <a:rPr lang="sl-SI" sz="1500" dirty="0" err="1"/>
+              <a:t>fragmentiran</a:t>
+            </a:r>
+            <a:r>
+              <a:rPr lang="sl-SI" sz="1500" dirty="0"/>
+              <a:t> trg: 73% podjetij le en oglas, osrednjeslovenska = 43% celotne ponudbe</a:t>
+            </a:r>
+          </a:p>
+          <a:p>
+            <a:r>
+              <a:rPr lang="sl-SI" sz="1500" dirty="0"/>
+              <a:t>Le 1% omenja programski jezik, najpogosteje Java</a:t>
+            </a:r>
+          </a:p>
+          <a:p>
+            <a:r>
+              <a:rPr lang="sl-SI" sz="1500" dirty="0"/>
+              <a:t>Korelacija plača-trajanje oglasa: praktično 0</a:t>
             </a:r>
           </a:p>
           <a:p>
@@ -4457,30 +4397,6 @@
           </a:p>
           <a:p>
             <a:endParaRPr lang="sl-SI" sz="1600" dirty="0"/>
-          </a:p>
-          <a:p>
-            <a:endParaRPr lang="sl-SI" sz="1600" dirty="0"/>
-          </a:p>
-          <a:p>
-            <a:endParaRPr lang="sl-SI" sz="1600" dirty="0"/>
-          </a:p>
-          <a:p>
-            <a:pPr marL="0" indent="0">
-              <a:buNone/>
-            </a:pPr>
-            <a:endParaRPr lang="sl-SI" sz="1600" dirty="0"/>
-          </a:p>
-          <a:p>
-            <a:r>
-              <a:rPr lang="sl-SI" sz="1600" dirty="0"/>
-              <a:t>Najvišje postavke v promociji</a:t>
-            </a:r>
-          </a:p>
-          <a:p>
-            <a:r>
-              <a:rPr lang="sl-SI" sz="1600" dirty="0"/>
-              <a:t>Dela z manj prostimi mesti ne ponujajo višje</a:t>
-            </a:r>
           </a:p>
         </p:txBody>
       </p:sp>
@@ -4759,7 +4675,7 @@
         </p:nvSpPr>
         <p:spPr>
           <a:xfrm>
-            <a:off x="4572000" y="720327"/>
+            <a:off x="4572000" y="735195"/>
             <a:ext cx="4436828" cy="3040640"/>
           </a:xfrm>
           <a:prstGeom prst="rect">
@@ -5261,10 +5177,10 @@
       </p:sp>
       <p:pic>
         <p:nvPicPr>
-          <p:cNvPr id="14" name="Slika 13">
+          <p:cNvPr id="6" name="Slika 5">
             <a:extLst>
               <a:ext uri="{FF2B5EF4-FFF2-40B4-BE49-F238E27FC236}">
-                <a16:creationId xmlns:a16="http://schemas.microsoft.com/office/drawing/2014/main" id="{90B86B0D-5DB5-8422-DFD2-917430CB8578}"/>
+                <a16:creationId xmlns:a16="http://schemas.microsoft.com/office/drawing/2014/main" id="{BC04F611-D5EC-9C00-6AE4-7EF8EDDB68FF}"/>
               </a:ext>
             </a:extLst>
           </p:cNvPr>
@@ -5275,101 +5191,27 @@
         </p:nvPicPr>
         <p:blipFill>
           <a:blip r:embed="rId3"/>
-          <a:srcRect l="1463"/>
+          <a:srcRect l="1503" t="823"/>
           <a:stretch>
             <a:fillRect/>
           </a:stretch>
         </p:blipFill>
         <p:spPr>
           <a:xfrm>
-            <a:off x="4705364" y="650143"/>
-            <a:ext cx="3115358" cy="1690516"/>
+            <a:off x="4953000" y="2558350"/>
+            <a:ext cx="3921158" cy="2239160"/>
           </a:xfrm>
           <a:prstGeom prst="rect">
             <a:avLst/>
           </a:prstGeom>
         </p:spPr>
       </p:pic>
-      <p:cxnSp>
-        <p:nvCxnSpPr>
-          <p:cNvPr id="20" name="Raven povezovalnik 19">
+      <p:pic>
+        <p:nvPicPr>
+          <p:cNvPr id="10" name="Slika 9">
             <a:extLst>
               <a:ext uri="{FF2B5EF4-FFF2-40B4-BE49-F238E27FC236}">
-                <a16:creationId xmlns:a16="http://schemas.microsoft.com/office/drawing/2014/main" id="{B6CD85A4-87CC-A019-0DF1-ED2FDCA7C78A}"/>
-              </a:ext>
-            </a:extLst>
-          </p:cNvPr>
-          <p:cNvCxnSpPr>
-            <a:cxnSpLocks/>
-          </p:cNvCxnSpPr>
-          <p:nvPr/>
-        </p:nvCxnSpPr>
-        <p:spPr>
-          <a:xfrm>
-            <a:off x="4577340" y="2367502"/>
-            <a:ext cx="4453790" cy="0"/>
-          </a:xfrm>
-          <a:prstGeom prst="line">
-            <a:avLst/>
-          </a:prstGeom>
-        </p:spPr>
-        <p:style>
-          <a:lnRef idx="1">
-            <a:schemeClr val="accent1"/>
-          </a:lnRef>
-          <a:fillRef idx="0">
-            <a:schemeClr val="accent1"/>
-          </a:fillRef>
-          <a:effectRef idx="0">
-            <a:schemeClr val="accent1"/>
-          </a:effectRef>
-          <a:fontRef idx="minor">
-            <a:schemeClr val="tx1"/>
-          </a:fontRef>
-        </p:style>
-      </p:cxnSp>
-      <p:cxnSp>
-        <p:nvCxnSpPr>
-          <p:cNvPr id="26" name="Raven povezovalnik 25">
-            <a:extLst>
-              <a:ext uri="{FF2B5EF4-FFF2-40B4-BE49-F238E27FC236}">
-                <a16:creationId xmlns:a16="http://schemas.microsoft.com/office/drawing/2014/main" id="{9E162C5A-703F-59EC-FCB0-7F3EB6216B12}"/>
-              </a:ext>
-            </a:extLst>
-          </p:cNvPr>
-          <p:cNvCxnSpPr/>
-          <p:nvPr/>
-        </p:nvCxnSpPr>
-        <p:spPr>
-          <a:xfrm flipH="1">
-            <a:off x="84811" y="2356078"/>
-            <a:ext cx="4419340" cy="0"/>
-          </a:xfrm>
-          <a:prstGeom prst="line">
-            <a:avLst/>
-          </a:prstGeom>
-        </p:spPr>
-        <p:style>
-          <a:lnRef idx="1">
-            <a:schemeClr val="accent1"/>
-          </a:lnRef>
-          <a:fillRef idx="0">
-            <a:schemeClr val="accent1"/>
-          </a:fillRef>
-          <a:effectRef idx="0">
-            <a:schemeClr val="accent1"/>
-          </a:effectRef>
-          <a:fontRef idx="minor">
-            <a:schemeClr val="tx1"/>
-          </a:fontRef>
-        </p:style>
-      </p:cxnSp>
-      <p:pic>
-        <p:nvPicPr>
-          <p:cNvPr id="28" name="Slika 27">
-            <a:extLst>
-              <a:ext uri="{FF2B5EF4-FFF2-40B4-BE49-F238E27FC236}">
-                <a16:creationId xmlns:a16="http://schemas.microsoft.com/office/drawing/2014/main" id="{952856E8-6D4E-D382-D9C9-529EEF0A342F}"/>
+                <a16:creationId xmlns:a16="http://schemas.microsoft.com/office/drawing/2014/main" id="{806F1706-A898-1A26-8A28-58F1771792BE}"/>
               </a:ext>
             </a:extLst>
           </p:cNvPr>
@@ -5386,8 +5228,8 @@
         </p:blipFill>
         <p:spPr>
           <a:xfrm>
-            <a:off x="4813970" y="2884635"/>
-            <a:ext cx="3287959" cy="1858526"/>
+            <a:off x="163607" y="2727960"/>
+            <a:ext cx="4304139" cy="2005966"/>
           </a:xfrm>
           <a:prstGeom prst="rect">
             <a:avLst/>
@@ -5398,325 +5240,6 @@
     <p:extLst>
       <p:ext uri="{BB962C8B-B14F-4D97-AF65-F5344CB8AC3E}">
         <p14:creationId xmlns:p14="http://schemas.microsoft.com/office/powerpoint/2010/main" val="2633653843"/>
-      </p:ext>
-    </p:extLst>
-  </p:cSld>
-  <p:clrMapOvr>
-    <a:masterClrMapping/>
-  </p:clrMapOvr>
-</p:sld>
-</file>
-
-<file path=ppt/slides/slide3.xml><?xml version="1.0" encoding="utf-8"?>
-<p:sld xmlns:a="http://schemas.openxmlformats.org/drawingml/2006/main" xmlns:r="http://schemas.openxmlformats.org/officeDocument/2006/relationships" xmlns:p="http://schemas.openxmlformats.org/presentationml/2006/main">
-  <p:cSld>
-    <p:spTree>
-      <p:nvGrpSpPr>
-        <p:cNvPr id="1" name=""/>
-        <p:cNvGrpSpPr/>
-        <p:nvPr/>
-      </p:nvGrpSpPr>
-      <p:grpSpPr>
-        <a:xfrm>
-          <a:off x="0" y="0"/>
-          <a:ext cx="0" cy="0"/>
-          <a:chOff x="0" y="0"/>
-          <a:chExt cx="0" cy="0"/>
-        </a:xfrm>
-      </p:grpSpPr>
-      <p:sp>
-        <p:nvSpPr>
-          <p:cNvPr id="2" name="Title 1">
-            <a:extLst>
-              <a:ext uri="{FF2B5EF4-FFF2-40B4-BE49-F238E27FC236}">
-                <a16:creationId xmlns:a16="http://schemas.microsoft.com/office/drawing/2014/main" id="{38032997-45F8-4B43-BA59-BC34FE1B6DF0}"/>
-              </a:ext>
-            </a:extLst>
-          </p:cNvPr>
-          <p:cNvSpPr>
-            <a:spLocks noGrp="1"/>
-          </p:cNvSpPr>
-          <p:nvPr>
-            <p:ph type="title"/>
-          </p:nvPr>
-        </p:nvSpPr>
-        <p:spPr>
-          <a:xfrm>
-            <a:off x="99391" y="102394"/>
-            <a:ext cx="8945218" cy="410942"/>
-          </a:xfrm>
-        </p:spPr>
-        <p:txBody>
-          <a:bodyPr>
-            <a:normAutofit/>
-          </a:bodyPr>
-          <a:lstStyle/>
-          <a:p>
-            <a:r>
-              <a:rPr lang="sl-SI" sz="1600" b="1" dirty="0">
-                <a:latin typeface="+mn-lt"/>
-              </a:rPr>
-              <a:t>Dodatne zanimive ugotovitve</a:t>
-            </a:r>
-            <a:endParaRPr lang="en-US" sz="1600" b="1" dirty="0">
-              <a:latin typeface="+mn-lt"/>
-            </a:endParaRPr>
-          </a:p>
-        </p:txBody>
-      </p:sp>
-      <p:sp>
-        <p:nvSpPr>
-          <p:cNvPr id="3" name="Content Placeholder 2">
-            <a:extLst>
-              <a:ext uri="{FF2B5EF4-FFF2-40B4-BE49-F238E27FC236}">
-                <a16:creationId xmlns:a16="http://schemas.microsoft.com/office/drawing/2014/main" id="{E736DCB2-1C93-E142-85FE-F367FBA7EB28}"/>
-              </a:ext>
-            </a:extLst>
-          </p:cNvPr>
-          <p:cNvSpPr>
-            <a:spLocks noGrp="1"/>
-          </p:cNvSpPr>
-          <p:nvPr>
-            <p:ph idx="1"/>
-          </p:nvPr>
-        </p:nvSpPr>
-        <p:spPr>
-          <a:xfrm>
-            <a:off x="99392" y="513336"/>
-            <a:ext cx="8945217" cy="4253927"/>
-          </a:xfrm>
-          <a:ln>
-            <a:solidFill>
-              <a:schemeClr val="tx1"/>
-            </a:solidFill>
-          </a:ln>
-        </p:spPr>
-        <p:txBody>
-          <a:bodyPr>
-            <a:normAutofit/>
-          </a:bodyPr>
-          <a:lstStyle/>
-          <a:p>
-            <a:r>
-              <a:rPr lang="sl-SI" sz="1600" dirty="0"/>
-              <a:t>Oglasi se ne objavljajo ob vikendih</a:t>
-            </a:r>
-          </a:p>
-          <a:p>
-            <a:r>
-              <a:rPr lang="sl-SI" sz="1600" dirty="0"/>
-              <a:t>Najvišja urna postavka: 60€</a:t>
-            </a:r>
-          </a:p>
-          <a:p>
-            <a:r>
-              <a:rPr lang="sl-SI" sz="1600" dirty="0"/>
-              <a:t>Največ oglasov objavil Mercator (188), sledita mu Lidl (101) in Alpe-</a:t>
-            </a:r>
-            <a:r>
-              <a:rPr lang="sl-SI" sz="1600" dirty="0" err="1"/>
-              <a:t>Panon</a:t>
-            </a:r>
-            <a:r>
-              <a:rPr lang="sl-SI" sz="1600"/>
-              <a:t> (</a:t>
-            </a:r>
-            <a:r>
-              <a:rPr lang="sl-SI" sz="1600" dirty="0"/>
-              <a:t>71)</a:t>
-            </a:r>
-          </a:p>
-          <a:p>
-            <a:r>
-              <a:rPr lang="sl-SI" sz="1600" dirty="0"/>
-              <a:t>Izrazito največ oglasov v osrednjeslovenski regiji (1915), sledita ji gorenjska (481) in podravska (455)</a:t>
-            </a:r>
-          </a:p>
-          <a:p>
-            <a:endParaRPr lang="sl-SI" sz="1600" dirty="0"/>
-          </a:p>
-          <a:p>
-            <a:endParaRPr lang="en-US" sz="1600" dirty="0"/>
-          </a:p>
-        </p:txBody>
-      </p:sp>
-      <p:sp>
-        <p:nvSpPr>
-          <p:cNvPr id="6" name="Slide Number Placeholder 5">
-            <a:extLst>
-              <a:ext uri="{FF2B5EF4-FFF2-40B4-BE49-F238E27FC236}">
-                <a16:creationId xmlns:a16="http://schemas.microsoft.com/office/drawing/2014/main" id="{643A65B7-6F2E-D145-A02C-A24F07A611A3}"/>
-              </a:ext>
-            </a:extLst>
-          </p:cNvPr>
-          <p:cNvSpPr>
-            <a:spLocks noGrp="1"/>
-          </p:cNvSpPr>
-          <p:nvPr>
-            <p:ph type="sldNum" sz="quarter" idx="12"/>
-          </p:nvPr>
-        </p:nvSpPr>
-        <p:spPr/>
-        <p:txBody>
-          <a:bodyPr/>
-          <a:lstStyle/>
-          <a:p>
-            <a:fld id="{03BC8BC1-971C-5C4D-898D-87CE7EF1EB36}" type="slidenum">
-              <a:rPr lang="en-US" smtClean="0"/>
-              <a:t>3</a:t>
-            </a:fld>
-            <a:endParaRPr lang="en-US"/>
-          </a:p>
-        </p:txBody>
-      </p:sp>
-      <p:sp>
-        <p:nvSpPr>
-          <p:cNvPr id="8" name="Date Placeholder 11">
-            <a:extLst>
-              <a:ext uri="{FF2B5EF4-FFF2-40B4-BE49-F238E27FC236}">
-                <a16:creationId xmlns:a16="http://schemas.microsoft.com/office/drawing/2014/main" id="{07C4AC33-717C-454A-96DC-39E4E45FC358}"/>
-              </a:ext>
-            </a:extLst>
-          </p:cNvPr>
-          <p:cNvSpPr>
-            <a:spLocks noGrp="1"/>
-          </p:cNvSpPr>
-          <p:nvPr>
-            <p:ph type="dt" sz="half" idx="10"/>
-          </p:nvPr>
-        </p:nvSpPr>
-        <p:spPr>
-          <a:xfrm>
-            <a:off x="76857" y="4800600"/>
-            <a:ext cx="3754164" cy="273844"/>
-          </a:xfrm>
-        </p:spPr>
-        <p:txBody>
-          <a:bodyPr/>
-          <a:lstStyle/>
-          <a:p>
-            <a:r>
-              <a:rPr lang="en-US" dirty="0"/>
-              <a:t>15. 4. 2026</a:t>
-            </a:r>
-          </a:p>
-        </p:txBody>
-      </p:sp>
-      <p:sp>
-        <p:nvSpPr>
-          <p:cNvPr id="9" name="Footer Placeholder 12">
-            <a:extLst>
-              <a:ext uri="{FF2B5EF4-FFF2-40B4-BE49-F238E27FC236}">
-                <a16:creationId xmlns:a16="http://schemas.microsoft.com/office/drawing/2014/main" id="{1E484604-5097-374A-BB61-C5B3CD4C807B}"/>
-              </a:ext>
-            </a:extLst>
-          </p:cNvPr>
-          <p:cNvSpPr>
-            <a:spLocks noGrp="1"/>
-          </p:cNvSpPr>
-          <p:nvPr>
-            <p:ph type="ftr" sz="quarter" idx="11"/>
-          </p:nvPr>
-        </p:nvSpPr>
-        <p:spPr>
-          <a:xfrm>
-            <a:off x="3028950" y="4767263"/>
-            <a:ext cx="3086100" cy="273844"/>
-          </a:xfrm>
-        </p:spPr>
-        <p:txBody>
-          <a:bodyPr/>
-          <a:lstStyle/>
-          <a:p>
-            <a:r>
-              <a:rPr lang="en-US" dirty="0"/>
-              <a:t>PR25-26, </a:t>
-            </a:r>
-            <a:r>
-              <a:rPr lang="en-US" dirty="0" err="1"/>
-              <a:t>Vmesna</a:t>
-            </a:r>
-            <a:r>
-              <a:rPr lang="en-US" dirty="0"/>
-              <a:t> </a:t>
-            </a:r>
-            <a:r>
-              <a:rPr lang="en-US" dirty="0" err="1"/>
-              <a:t>predstavitev</a:t>
-            </a:r>
-            <a:endParaRPr lang="en-US" dirty="0"/>
-          </a:p>
-        </p:txBody>
-      </p:sp>
-      <p:pic>
-        <p:nvPicPr>
-          <p:cNvPr id="12" name="Slika 11">
-            <a:extLst>
-              <a:ext uri="{FF2B5EF4-FFF2-40B4-BE49-F238E27FC236}">
-                <a16:creationId xmlns:a16="http://schemas.microsoft.com/office/drawing/2014/main" id="{8725B8F6-D98A-4EE8-1CAC-8171FF7D5DFF}"/>
-              </a:ext>
-            </a:extLst>
-          </p:cNvPr>
-          <p:cNvPicPr>
-            <a:picLocks noChangeAspect="1"/>
-          </p:cNvPicPr>
-          <p:nvPr/>
-        </p:nvPicPr>
-        <p:blipFill>
-          <a:blip r:embed="rId3"/>
-          <a:stretch>
-            <a:fillRect/>
-          </a:stretch>
-        </p:blipFill>
-        <p:spPr>
-          <a:xfrm>
-            <a:off x="242375" y="2155707"/>
-            <a:ext cx="4812562" cy="2386556"/>
-          </a:xfrm>
-          <a:prstGeom prst="rect">
-            <a:avLst/>
-          </a:prstGeom>
-        </p:spPr>
-      </p:pic>
-      <p:pic>
-        <p:nvPicPr>
-          <p:cNvPr id="14" name="Slika 13">
-            <a:extLst>
-              <a:ext uri="{FF2B5EF4-FFF2-40B4-BE49-F238E27FC236}">
-                <a16:creationId xmlns:a16="http://schemas.microsoft.com/office/drawing/2014/main" id="{C18EFFCE-B5A8-8383-B3BE-F4CDD81C2B70}"/>
-              </a:ext>
-            </a:extLst>
-          </p:cNvPr>
-          <p:cNvPicPr>
-            <a:picLocks noChangeAspect="1"/>
-          </p:cNvPicPr>
-          <p:nvPr/>
-        </p:nvPicPr>
-        <p:blipFill>
-          <a:blip r:embed="rId4"/>
-          <a:stretch>
-            <a:fillRect/>
-          </a:stretch>
-        </p:blipFill>
-        <p:spPr>
-          <a:xfrm>
-            <a:off x="5080743" y="2361247"/>
-            <a:ext cx="3933342" cy="1852055"/>
-          </a:xfrm>
-          <a:prstGeom prst="rect">
-            <a:avLst/>
-          </a:prstGeom>
-          <a:ln>
-            <a:solidFill>
-              <a:schemeClr val="tx1"/>
-            </a:solidFill>
-          </a:ln>
-        </p:spPr>
-      </p:pic>
-    </p:spTree>
-    <p:extLst>
-      <p:ext uri="{BB962C8B-B14F-4D97-AF65-F5344CB8AC3E}">
-        <p14:creationId xmlns:p14="http://schemas.microsoft.com/office/powerpoint/2010/main" val="3280023697"/>
       </p:ext>
     </p:extLst>
   </p:cSld>
